--- a/A02-HuggingFace-vs-OpenAI/presentation/A02a_DataProxy_ElijahRaines_ITA2376.pptx
+++ b/A02-HuggingFace-vs-OpenAI/presentation/A02a_DataProxy_ElijahRaines_ITA2376.pptx
@@ -11387,7 +11387,7 @@
                   <a:srgbClr val="273540"/>
                 </a:solidFill>
               </a:rPr>
-              <a:t>Brandon Matias, Elijah Raines, Justin Davis, Jonah Joseph</a:t>
+              <a:t>Elijah Raines (Team Leader), Brandon Matias, Justin Davis, Jonah Joseph, Osemudia Ogedengbe</a:t>
             </a:r>
             <a:endParaRPr sz="1150">
               <a:solidFill>
